--- a/curso/pptx/S46.pptx
+++ b/curso/pptx/S46.pptx
@@ -3890,8 +3890,8 @@
         </p:nvSpPr>
         <p:spPr>
           <a:xfrm>
-            <a:off x="640000" y="420000"/>
-            <a:ext cx="10912000" cy="420000"/>
+            <a:off x="10652000" y="380000"/>
+            <a:ext cx="900000" cy="800000"/>
           </a:xfrm>
           <a:prstGeom prst="rect">
             <a:avLst/>
@@ -3906,17 +3906,17 @@
           <a:p>
             <a:pPr>
               <a:spcAft>
-                <a:spcPts val="810"/>
+                <a:spcPts val="1980"/>
               </a:spcAft>
             </a:pPr>
             <a:r>
-              <a:rPr sz="1800" b="1">
+              <a:rPr sz="4400" b="0">
                 <a:solidFill>
                   <a:srgbClr val="1F2A44"/>
                 </a:solidFill>
                 <a:latin typeface="Nunito Sans"/>
               </a:rPr>
-              <a:t>🦉 Aula de Filosofía</a:t>
+              <a:t>🙃</a:t>
             </a:r>
           </a:p>
         </p:txBody>

--- a/curso/pptx/S46.pptx
+++ b/curso/pptx/S46.pptx
@@ -471,426 +471,6 @@
     </a:lvl9pPr>
   </p:notesStyle>
 </p:notesMaster>
-</file>
-
-<file path=ppt/notesSlides/notesSlide1.xml><?xml version="1.0" encoding="utf-8"?>
-<p:notes xmlns:a="http://schemas.openxmlformats.org/drawingml/2006/main" xmlns:p="http://schemas.openxmlformats.org/presentationml/2006/main" xmlns:r="http://schemas.openxmlformats.org/officeDocument/2006/relationships">
-  <p:cSld>
-    <p:spTree>
-      <p:nvGrpSpPr>
-        <p:cNvPr id="1" name=""/>
-        <p:cNvGrpSpPr/>
-        <p:nvPr/>
-      </p:nvGrpSpPr>
-      <p:grpSpPr>
-        <a:xfrm>
-          <a:off x="0" y="0"/>
-          <a:ext cx="0" cy="0"/>
-          <a:chOff x="0" y="0"/>
-          <a:chExt cx="0" cy="0"/>
-        </a:xfrm>
-      </p:grpSpPr>
-      <p:sp>
-        <p:nvSpPr>
-          <p:cNvPr id="2" name="Slide Image Placeholder 1"/>
-          <p:cNvSpPr>
-            <a:spLocks noGrp="1"/>
-          </p:cNvSpPr>
-          <p:nvPr>
-            <p:ph type="sldImg" idx="2"/>
-          </p:nvPr>
-        </p:nvSpPr>
-        <p:spPr/>
-      </p:sp>
-      <p:sp>
-        <p:nvSpPr>
-          <p:cNvPr id="3" name="Notes Placeholder 2"/>
-          <p:cNvSpPr>
-            <a:spLocks noGrp="1"/>
-          </p:cNvSpPr>
-          <p:nvPr>
-            <p:ph type="body" idx="3" sz="quarter"/>
-          </p:nvPr>
-        </p:nvSpPr>
-        <p:spPr/>
-        <p:txBody>
-          <a:bodyPr/>
-          <a:lstStyle/>
-          <a:p>
-            <a:r>
-              <a:t>3 minutos. Sin apuntes. Es para recordar, no cuenta para nota.</a:t>
-            </a:r>
-          </a:p>
-        </p:txBody>
-      </p:sp>
-      <p:sp>
-        <p:nvSpPr>
-          <p:cNvPr id="4" name="Slide Number Placeholder 3"/>
-          <p:cNvSpPr>
-            <a:spLocks noGrp="1"/>
-          </p:cNvSpPr>
-          <p:nvPr>
-            <p:ph type="sldNum" idx="5" sz="quarter"/>
-          </p:nvPr>
-        </p:nvSpPr>
-        <p:spPr/>
-      </p:sp>
-    </p:spTree>
-  </p:cSld>
-  <p:clrMapOvr>
-    <a:masterClrMapping/>
-  </p:clrMapOvr>
-</p:notes>
-</file>
-
-<file path=ppt/notesSlides/notesSlide2.xml><?xml version="1.0" encoding="utf-8"?>
-<p:notes xmlns:a="http://schemas.openxmlformats.org/drawingml/2006/main" xmlns:p="http://schemas.openxmlformats.org/presentationml/2006/main" xmlns:r="http://schemas.openxmlformats.org/officeDocument/2006/relationships">
-  <p:cSld>
-    <p:spTree>
-      <p:nvGrpSpPr>
-        <p:cNvPr id="1" name=""/>
-        <p:cNvGrpSpPr/>
-        <p:nvPr/>
-      </p:nvGrpSpPr>
-      <p:grpSpPr>
-        <a:xfrm>
-          <a:off x="0" y="0"/>
-          <a:ext cx="0" cy="0"/>
-          <a:chOff x="0" y="0"/>
-          <a:chExt cx="0" cy="0"/>
-        </a:xfrm>
-      </p:grpSpPr>
-      <p:sp>
-        <p:nvSpPr>
-          <p:cNvPr id="2" name="Slide Image Placeholder 1"/>
-          <p:cNvSpPr>
-            <a:spLocks noGrp="1"/>
-          </p:cNvSpPr>
-          <p:nvPr>
-            <p:ph type="sldImg" idx="2"/>
-          </p:nvPr>
-        </p:nvSpPr>
-        <p:spPr/>
-      </p:sp>
-      <p:sp>
-        <p:nvSpPr>
-          <p:cNvPr id="3" name="Notes Placeholder 2"/>
-          <p:cNvSpPr>
-            <a:spLocks noGrp="1"/>
-          </p:cNvSpPr>
-          <p:nvPr>
-            <p:ph type="body" idx="3" sz="quarter"/>
-          </p:nvPr>
-        </p:nvSpPr>
-        <p:spPr/>
-        <p:txBody>
-          <a:bodyPr/>
-          <a:lstStyle/>
-          <a:p>
-            <a:r>
-              <a:t>3 minutos. Sin apuntes. Es para recordar, no cuenta para nota.</a:t>
-            </a:r>
-          </a:p>
-        </p:txBody>
-      </p:sp>
-      <p:sp>
-        <p:nvSpPr>
-          <p:cNvPr id="4" name="Slide Number Placeholder 3"/>
-          <p:cNvSpPr>
-            <a:spLocks noGrp="1"/>
-          </p:cNvSpPr>
-          <p:nvPr>
-            <p:ph type="sldNum" idx="5" sz="quarter"/>
-          </p:nvPr>
-        </p:nvSpPr>
-        <p:spPr/>
-      </p:sp>
-    </p:spTree>
-  </p:cSld>
-  <p:clrMapOvr>
-    <a:masterClrMapping/>
-  </p:clrMapOvr>
-</p:notes>
-</file>
-
-<file path=ppt/notesSlides/notesSlide3.xml><?xml version="1.0" encoding="utf-8"?>
-<p:notes xmlns:a="http://schemas.openxmlformats.org/drawingml/2006/main" xmlns:p="http://schemas.openxmlformats.org/presentationml/2006/main" xmlns:r="http://schemas.openxmlformats.org/officeDocument/2006/relationships">
-  <p:cSld>
-    <p:spTree>
-      <p:nvGrpSpPr>
-        <p:cNvPr id="1" name=""/>
-        <p:cNvGrpSpPr/>
-        <p:nvPr/>
-      </p:nvGrpSpPr>
-      <p:grpSpPr>
-        <a:xfrm>
-          <a:off x="0" y="0"/>
-          <a:ext cx="0" cy="0"/>
-          <a:chOff x="0" y="0"/>
-          <a:chExt cx="0" cy="0"/>
-        </a:xfrm>
-      </p:grpSpPr>
-      <p:sp>
-        <p:nvSpPr>
-          <p:cNvPr id="2" name="Slide Image Placeholder 1"/>
-          <p:cNvSpPr>
-            <a:spLocks noGrp="1"/>
-          </p:cNvSpPr>
-          <p:nvPr>
-            <p:ph type="sldImg" idx="2"/>
-          </p:nvPr>
-        </p:nvSpPr>
-        <p:spPr/>
-      </p:sp>
-      <p:sp>
-        <p:nvSpPr>
-          <p:cNvPr id="3" name="Notes Placeholder 2"/>
-          <p:cNvSpPr>
-            <a:spLocks noGrp="1"/>
-          </p:cNvSpPr>
-          <p:nvPr>
-            <p:ph type="body" idx="3" sz="quarter"/>
-          </p:nvPr>
-        </p:nvSpPr>
-        <p:spPr/>
-        <p:txBody>
-          <a:bodyPr/>
-          <a:lstStyle/>
-          <a:p>
-            <a:r>
-              <a:t>Nadie tiene que contestar: solo pensarlo.</a:t>
-            </a:r>
-          </a:p>
-        </p:txBody>
-      </p:sp>
-      <p:sp>
-        <p:nvSpPr>
-          <p:cNvPr id="4" name="Slide Number Placeholder 3"/>
-          <p:cNvSpPr>
-            <a:spLocks noGrp="1"/>
-          </p:cNvSpPr>
-          <p:nvPr>
-            <p:ph type="sldNum" idx="5" sz="quarter"/>
-          </p:nvPr>
-        </p:nvSpPr>
-        <p:spPr/>
-      </p:sp>
-    </p:spTree>
-  </p:cSld>
-  <p:clrMapOvr>
-    <a:masterClrMapping/>
-  </p:clrMapOvr>
-</p:notes>
-</file>
-
-<file path=ppt/notesSlides/notesSlide4.xml><?xml version="1.0" encoding="utf-8"?>
-<p:notes xmlns:a="http://schemas.openxmlformats.org/drawingml/2006/main" xmlns:p="http://schemas.openxmlformats.org/presentationml/2006/main" xmlns:r="http://schemas.openxmlformats.org/officeDocument/2006/relationships">
-  <p:cSld>
-    <p:spTree>
-      <p:nvGrpSpPr>
-        <p:cNvPr id="1" name=""/>
-        <p:cNvGrpSpPr/>
-        <p:nvPr/>
-      </p:nvGrpSpPr>
-      <p:grpSpPr>
-        <a:xfrm>
-          <a:off x="0" y="0"/>
-          <a:ext cx="0" cy="0"/>
-          <a:chOff x="0" y="0"/>
-          <a:chExt cx="0" cy="0"/>
-        </a:xfrm>
-      </p:grpSpPr>
-      <p:sp>
-        <p:nvSpPr>
-          <p:cNvPr id="2" name="Slide Image Placeholder 1"/>
-          <p:cNvSpPr>
-            <a:spLocks noGrp="1"/>
-          </p:cNvSpPr>
-          <p:nvPr>
-            <p:ph type="sldImg" idx="2"/>
-          </p:nvPr>
-        </p:nvSpPr>
-        <p:spPr/>
-      </p:sp>
-      <p:sp>
-        <p:nvSpPr>
-          <p:cNvPr id="3" name="Notes Placeholder 2"/>
-          <p:cNvSpPr>
-            <a:spLocks noGrp="1"/>
-          </p:cNvSpPr>
-          <p:nvPr>
-            <p:ph type="body" idx="3" sz="quarter"/>
-          </p:nvPr>
-        </p:nvSpPr>
-        <p:spPr/>
-        <p:txBody>
-          <a:bodyPr/>
-          <a:lstStyle/>
-          <a:p>
-            <a:r>
-              <a:t>Dejar unos segundos para que piensen la respuesta fácil antes de enseñar los pasos.</a:t>
-            </a:r>
-          </a:p>
-        </p:txBody>
-      </p:sp>
-      <p:sp>
-        <p:nvSpPr>
-          <p:cNvPr id="4" name="Slide Number Placeholder 3"/>
-          <p:cNvSpPr>
-            <a:spLocks noGrp="1"/>
-          </p:cNvSpPr>
-          <p:nvPr>
-            <p:ph type="sldNum" idx="5" sz="quarter"/>
-          </p:nvPr>
-        </p:nvSpPr>
-        <p:spPr/>
-      </p:sp>
-    </p:spTree>
-  </p:cSld>
-  <p:clrMapOvr>
-    <a:masterClrMapping/>
-  </p:clrMapOvr>
-</p:notes>
-</file>
-
-<file path=ppt/notesSlides/notesSlide5.xml><?xml version="1.0" encoding="utf-8"?>
-<p:notes xmlns:a="http://schemas.openxmlformats.org/drawingml/2006/main" xmlns:p="http://schemas.openxmlformats.org/presentationml/2006/main" xmlns:r="http://schemas.openxmlformats.org/officeDocument/2006/relationships">
-  <p:cSld>
-    <p:spTree>
-      <p:nvGrpSpPr>
-        <p:cNvPr id="1" name=""/>
-        <p:cNvGrpSpPr/>
-        <p:nvPr/>
-      </p:nvGrpSpPr>
-      <p:grpSpPr>
-        <a:xfrm>
-          <a:off x="0" y="0"/>
-          <a:ext cx="0" cy="0"/>
-          <a:chOff x="0" y="0"/>
-          <a:chExt cx="0" cy="0"/>
-        </a:xfrm>
-      </p:grpSpPr>
-      <p:sp>
-        <p:nvSpPr>
-          <p:cNvPr id="2" name="Slide Image Placeholder 1"/>
-          <p:cNvSpPr>
-            <a:spLocks noGrp="1"/>
-          </p:cNvSpPr>
-          <p:nvPr>
-            <p:ph type="sldImg" idx="2"/>
-          </p:nvPr>
-        </p:nvSpPr>
-        <p:spPr/>
-      </p:sp>
-      <p:sp>
-        <p:nvSpPr>
-          <p:cNvPr id="3" name="Notes Placeholder 2"/>
-          <p:cNvSpPr>
-            <a:spLocks noGrp="1"/>
-          </p:cNvSpPr>
-          <p:nvPr>
-            <p:ph type="body" idx="3" sz="quarter"/>
-          </p:nvPr>
-        </p:nvSpPr>
-        <p:spPr/>
-        <p:txBody>
-          <a:bodyPr/>
-          <a:lstStyle/>
-          <a:p>
-            <a:r>
-              <a:t>Dejar 2 minutos para que lo escriban. La diapositiva siguiente muestra el resumen.</a:t>
-            </a:r>
-          </a:p>
-        </p:txBody>
-      </p:sp>
-      <p:sp>
-        <p:nvSpPr>
-          <p:cNvPr id="4" name="Slide Number Placeholder 3"/>
-          <p:cNvSpPr>
-            <a:spLocks noGrp="1"/>
-          </p:cNvSpPr>
-          <p:nvPr>
-            <p:ph type="sldNum" idx="5" sz="quarter"/>
-          </p:nvPr>
-        </p:nvSpPr>
-        <p:spPr/>
-      </p:sp>
-    </p:spTree>
-  </p:cSld>
-  <p:clrMapOvr>
-    <a:masterClrMapping/>
-  </p:clrMapOvr>
-</p:notes>
-</file>
-
-<file path=ppt/notesSlides/notesSlide6.xml><?xml version="1.0" encoding="utf-8"?>
-<p:notes xmlns:a="http://schemas.openxmlformats.org/drawingml/2006/main" xmlns:p="http://schemas.openxmlformats.org/presentationml/2006/main" xmlns:r="http://schemas.openxmlformats.org/officeDocument/2006/relationships">
-  <p:cSld>
-    <p:spTree>
-      <p:nvGrpSpPr>
-        <p:cNvPr id="1" name=""/>
-        <p:cNvGrpSpPr/>
-        <p:nvPr/>
-      </p:nvGrpSpPr>
-      <p:grpSpPr>
-        <a:xfrm>
-          <a:off x="0" y="0"/>
-          <a:ext cx="0" cy="0"/>
-          <a:chOff x="0" y="0"/>
-          <a:chExt cx="0" cy="0"/>
-        </a:xfrm>
-      </p:grpSpPr>
-      <p:sp>
-        <p:nvSpPr>
-          <p:cNvPr id="2" name="Slide Image Placeholder 1"/>
-          <p:cNvSpPr>
-            <a:spLocks noGrp="1"/>
-          </p:cNvSpPr>
-          <p:nvPr>
-            <p:ph type="sldImg" idx="2"/>
-          </p:nvPr>
-        </p:nvSpPr>
-        <p:spPr/>
-      </p:sp>
-      <p:sp>
-        <p:nvSpPr>
-          <p:cNvPr id="3" name="Notes Placeholder 2"/>
-          <p:cNvSpPr>
-            <a:spLocks noGrp="1"/>
-          </p:cNvSpPr>
-          <p:nvPr>
-            <p:ph type="body" idx="3" sz="quarter"/>
-          </p:nvPr>
-        </p:nvSpPr>
-        <p:spPr/>
-        <p:txBody>
-          <a:bodyPr/>
-          <a:lstStyle/>
-          <a:p>
-            <a:r>
-              <a:t>Buscar: «efecto anclaje precios» · «efecto encuadre psicología»</a:t>
-            </a:r>
-          </a:p>
-        </p:txBody>
-      </p:sp>
-      <p:sp>
-        <p:nvSpPr>
-          <p:cNvPr id="4" name="Slide Number Placeholder 3"/>
-          <p:cNvSpPr>
-            <a:spLocks noGrp="1"/>
-          </p:cNvSpPr>
-          <p:nvPr>
-            <p:ph type="sldNum" idx="5" sz="quarter"/>
-          </p:nvPr>
-        </p:nvSpPr>
-        <p:spPr/>
-      </p:sp>
-    </p:spTree>
-  </p:cSld>
-  <p:clrMapOvr>
-    <a:masterClrMapping/>
-  </p:clrMapOvr>
-</p:notes>
 </file>
 
 <file path=ppt/slideLayouts/slideLayout1.xml><?xml version="1.0" encoding="utf-8"?>

--- a/curso/pptx/S46.pptx
+++ b/curso/pptx/S46.pptx
@@ -4726,7 +4726,7 @@
                 </a:solidFill>
                 <a:latin typeface="Nunito Sans"/>
               </a:rPr>
-              <a:t>Chen quiere vender su bici usada. Antes de poner precio, mira cuánto piden por bicis iguales en internet: unos 150 €. Pone 140 €.</a:t>
+              <a:t>Un chico quiere vender su bici usada. Antes de poner precio, mira cuánto piden por bicis iguales en internet: unos 150 €. Pone 140 €.</a:t>
             </a:r>
           </a:p>
         </p:txBody>

--- a/curso/pptx/S46.pptx
+++ b/curso/pptx/S46.pptx
@@ -3574,7 +3574,7 @@
                 </a:solidFill>
                 <a:latin typeface="Fredoka"/>
               </a:rPr>
-              <a:t>Anclaje y encuadre</a:t>
+              <a:t>Efecto halo y primeras impresiones</a:t>
             </a:r>
           </a:p>
         </p:txBody>
@@ -3613,7 +3613,7 @@
                 </a:solidFill>
                 <a:latin typeface="Nunito Sans"/>
               </a:rPr>
-              <a:t>El primer número que oímos (anclaje) y la forma de decir algo (encuadre) cambian nuestra decisión, aunque los datos sean los mismos.</a:t>
+              <a:t>El efecto halo es juzgar a una persona entera por un solo rasgo, como su aspecto, su fama o una primera impresión.</a:t>
             </a:r>
           </a:p>
         </p:txBody>
@@ -3717,7 +3717,7 @@
                 </a:solidFill>
                 <a:latin typeface="Fredoka"/>
               </a:rPr>
-              <a:t>Caso 1 · La rueda de la fortuna</a:t>
+              <a:t>Caso 1 · El famoso del anuncio</a:t>
             </a:r>
           </a:p>
         </p:txBody>
@@ -3799,7 +3799,7 @@
                 </a:solidFill>
                 <a:latin typeface="Nunito Sans"/>
               </a:rPr>
-              <a:t>Experimento de Tversky y Kahneman (1974). Giraban una rueda trucada que paraba en 10 o en 65. Luego preguntaban: «¿Qué porcentaje de países de la ONU son africanos?».</a:t>
+              <a:t>Un jugador de fútbol famoso anuncia un champú. «Si él lo usa, será bueno».</a:t>
             </a:r>
           </a:p>
         </p:txBody>
@@ -3847,7 +3847,7 @@
                 </a:solidFill>
                 <a:latin typeface="Nunito Sans"/>
               </a:rPr>
-              <a:t>La rueda no tenía nada que ver con la pregunta, y todos lo veían.</a:t>
+              <a:t>¿Qué rasgo veo? Que juega muy bien al fútbol.</a:t>
             </a:r>
           </a:p>
           <a:p>
@@ -3872,7 +3872,7 @@
                 </a:solidFill>
                 <a:latin typeface="Nunito Sans"/>
               </a:rPr>
-              <a:t>Aun así, entre los que vieron el 10, la respuesta típica fue un 25 %.</a:t>
+              <a:t>¿Qué deduzco? Que sabe de champús. No tiene nada que ver.</a:t>
             </a:r>
           </a:p>
           <a:p>
@@ -3897,7 +3897,7 @@
                 </a:solidFill>
                 <a:latin typeface="Nunito Sans"/>
               </a:rPr>
-              <a:t>Entre los que vieron el 65, la respuesta típica fue un 45 %.</a:t>
+              <a:t>Es el efecto halo, y la marca lo sabe: por eso le paga.</a:t>
             </a:r>
           </a:p>
           <a:p>
@@ -3922,7 +3922,7 @@
                 </a:solidFill>
                 <a:latin typeface="Nunito Sans"/>
               </a:rPr>
-              <a:t>Conclusión: un número al azar sirvió de ancla y movió la respuesta.</a:t>
+              <a:t>Conclusión: ser bueno en una cosa no te hace experto en otra. Lo vimos en la sesión 8.</a:t>
             </a:r>
           </a:p>
         </p:txBody>
@@ -4026,7 +4026,7 @@
                 </a:solidFill>
                 <a:latin typeface="Fredoka"/>
               </a:rPr>
-              <a:t>Caso 2 · Las zapatillas del principio</a:t>
+              <a:t>Caso 2 · La letra bonita</a:t>
             </a:r>
           </a:p>
         </p:txBody>
@@ -4108,7 +4108,7 @@
                 </a:solidFill>
                 <a:latin typeface="Nunito Sans"/>
               </a:rPr>
-              <a:t>Tienda 1: «Antes 180 €. Ahora 90 €». Tienda 2: «90 €». Son las mismas zapatillas. (Ejemplo inventado.)</a:t>
+              <a:t>Dos exámenes con las mismas respuestas. Uno tiene letra clara y limpia; el otro, letra difícil y tachones. (Ejemplo inventado.)</a:t>
             </a:r>
           </a:p>
         </p:txBody>
@@ -4156,7 +4156,7 @@
                 </a:solidFill>
                 <a:latin typeface="Nunito Sans"/>
               </a:rPr>
-              <a:t>«Antes 180 €» es el ancla: me hace sentir que 90 € es una ganga.</a:t>
+              <a:t>El contenido es el mismo: deberían tener la misma nota.</a:t>
             </a:r>
           </a:p>
           <a:p>
@@ -4181,7 +4181,7 @@
                 </a:solidFill>
                 <a:latin typeface="Nunito Sans"/>
               </a:rPr>
-              <a:t>La tienda 2 no pone ancla: 90 € parece solo un precio.</a:t>
+              <a:t>Pero la letra bonita da buena impresión de todo el examen.</a:t>
             </a:r>
           </a:p>
           <a:p>
@@ -4206,7 +4206,7 @@
                 </a:solidFill>
                 <a:latin typeface="Nunito Sans"/>
               </a:rPr>
-              <a:t>Las zapatillas cuestan lo mismo en las dos tiendas.</a:t>
+              <a:t>Es fácil puntuar un poco mejor el limpio sin darse cuenta.</a:t>
             </a:r>
           </a:p>
           <a:p>
@@ -4231,7 +4231,7 @@
                 </a:solidFill>
                 <a:latin typeface="Nunito Sans"/>
               </a:rPr>
-              <a:t>Conclusión: me pregunto «¿cuánto pagaría si no hubiera visto el primer precio?».</a:t>
+              <a:t>Conclusión: halo. Por eso ayuda corregir con criterios escritos y sin mirar el nombre.</a:t>
             </a:r>
           </a:p>
         </p:txBody>
@@ -4335,7 +4335,7 @@
                 </a:solidFill>
                 <a:latin typeface="Fredoka"/>
               </a:rPr>
-              <a:t>Caso 3 · Dos maneras de decirlo</a:t>
+              <a:t>Caso 3 · El primer día</a:t>
             </a:r>
           </a:p>
         </p:txBody>
@@ -4417,7 +4417,7 @@
                 </a:solidFill>
                 <a:latin typeface="Nunito Sans"/>
               </a:rPr>
-              <a:t>Un médico explica una operación: «El 90 % sobrevive». Otro médico explica la misma operación: «El 10 % muere».</a:t>
+              <a:t>El primer día de campamento, un chico no saludó a nadie. Algunos decidieron: «Es un borde». En realidad, estaba nervioso.</a:t>
             </a:r>
           </a:p>
         </p:txBody>
@@ -4465,7 +4465,7 @@
                 </a:solidFill>
                 <a:latin typeface="Nunito Sans"/>
               </a:rPr>
-              <a:t>¿Los datos son distintos? No: de cada 100 personas, 90 viven y 10 mueren.</a:t>
+              <a:t>La primera impresión se formó en un momento.</a:t>
             </a:r>
           </a:p>
           <a:p>
@@ -4490,7 +4490,7 @@
                 </a:solidFill>
                 <a:latin typeface="Nunito Sans"/>
               </a:rPr>
-              <a:t>Pero «sobrevive» suena a esperanza y «muere» suena a miedo.</a:t>
+              <a:t>Después, todo lo que hacía ese chico parecía confirmarla (sesión 45).</a:t>
             </a:r>
           </a:p>
           <a:p>
@@ -4515,7 +4515,7 @@
                 </a:solidFill>
                 <a:latin typeface="Nunito Sans"/>
               </a:rPr>
-              <a:t>En estudios reales, con «el 90 % sobrevive» más personas eligen operarse, también médicos.</a:t>
+              <a:t>Nadie pensó en otras explicaciones: nervios, timidez, un mal día.</a:t>
             </a:r>
           </a:p>
           <a:p>
@@ -4540,7 +4540,7 @@
                 </a:solidFill>
                 <a:latin typeface="Nunito Sans"/>
               </a:rPr>
-              <a:t>Conclusión: encuadre. Antes de decidir, di el dato de las dos formas.</a:t>
+              <a:t>Conclusión: una primera impresión es una suposición, no un juicio final. Dale tiempo a la persona.</a:t>
             </a:r>
           </a:p>
         </p:txBody>
@@ -4644,7 +4644,7 @@
                 </a:solidFill>
                 <a:latin typeface="Fredoka"/>
               </a:rPr>
-              <a:t>⚠ ¿Anclado?</a:t>
+              <a:t>⚠ ¿Un rasgo que sí cuenta?</a:t>
             </a:r>
           </a:p>
         </p:txBody>
@@ -4726,7 +4726,7 @@
                 </a:solidFill>
                 <a:latin typeface="Nunito Sans"/>
               </a:rPr>
-              <a:t>Un chico quiere vender su bici usada. Antes de poner precio, mira cuánto piden por bicis iguales en internet: unos 150 €. Pone 140 €.</a:t>
+              <a:t>Para el equipo de fútbol del recreo, una chica elige primero a un chico. Lo ha visto marcar muchos goles todas las semanas.</a:t>
             </a:r>
           </a:p>
         </p:txBody>
@@ -4774,7 +4774,7 @@
                 </a:solidFill>
                 <a:latin typeface="Nunito Sans"/>
               </a:rPr>
-              <a:t>Se ha fijado en un primer número… ¿es anclaje?</a:t>
+              <a:t>Lo elige por un solo rasgo… ¿es efecto halo?</a:t>
             </a:r>
           </a:p>
           <a:p>
@@ -4799,7 +4799,7 @@
                 </a:solidFill>
                 <a:latin typeface="Nunito Sans"/>
               </a:rPr>
-              <a:t>Parece que sí: un número (150 €) ha decidido su precio.</a:t>
+              <a:t>Parece que sí: lo juzga por una sola cosa, los goles.</a:t>
             </a:r>
           </a:p>
           <a:p>
@@ -4824,7 +4824,7 @@
                 </a:solidFill>
                 <a:latin typeface="Nunito Sans"/>
               </a:rPr>
-              <a:t>Pero ese número no sale al azar: es lo que cuestan de verdad bicis iguales.</a:t>
+              <a:t>Pero ese rasgo tiene que ver con lo que decide: quién juega bien al fútbol.</a:t>
             </a:r>
           </a:p>
           <a:p>
@@ -4849,7 +4849,7 @@
                 </a:solidFill>
                 <a:latin typeface="Nunito Sans"/>
               </a:rPr>
-              <a:t>Comparar con precios reales es informarse. El anclaje es dejarse mover por un número que no viene a cuento o es inventado.</a:t>
+              <a:t>Halo sería pensar que, como marca goles, también es buen estudiante o buena persona.</a:t>
             </a:r>
           </a:p>
           <a:p>
@@ -4874,7 +4874,7 @@
                 </a:solidFill>
                 <a:latin typeface="Nunito Sans"/>
               </a:rPr>
-              <a:t>Conclusión: no todo número que usamos es un ancla. Pregunta: ¿este número tiene que ver con lo que decido?</a:t>
+              <a:t>Conclusión: usar un rasgo que viene a cuento es una buena razón. El halo es estirarlo a lo demás.</a:t>
             </a:r>
           </a:p>
         </p:txBody>
@@ -5130,7 +5130,7 @@
                 </a:solidFill>
                 <a:latin typeface="Nunito Sans"/>
               </a:rPr>
-              <a:t>Anclaje: el primer número que oímos influye en cómo juzgamos los siguientes.</a:t>
+              <a:t>El efecto halo es juzgar a alguien entero por un solo rasgo.</a:t>
             </a:r>
           </a:p>
           <a:p>
@@ -5155,7 +5155,7 @@
                 </a:solidFill>
                 <a:latin typeface="Nunito Sans"/>
               </a:rPr>
-              <a:t>Encuadre: la forma de decir un dato cambia lo que elegimos.</a:t>
+              <a:t>Las primeras impresiones se forman muy rápido y cuesta cambiarlas.</a:t>
             </a:r>
           </a:p>
           <a:p>
@@ -5180,7 +5180,7 @@
                 </a:solidFill>
                 <a:latin typeface="Nunito Sans"/>
               </a:rPr>
-              <a:t>Antes de decidir, quita el ancla y di el dato de las dos formas.</a:t>
+              <a:t>Un rasgo no dice cómo es una persona: dale tiempo y busca pruebas.</a:t>
             </a:r>
           </a:p>
         </p:txBody>
@@ -5284,7 +5284,7 @@
                 </a:solidFill>
                 <a:latin typeface="Fredoka"/>
               </a:rPr>
-              <a:t>El efecto anclaje y el efecto encuadre en las compras</a:t>
+              <a:t>El efecto halo en la publicidad y en la vida diaria</a:t>
             </a:r>
           </a:p>
         </p:txBody>
@@ -5323,7 +5323,7 @@
                 </a:solidFill>
                 <a:latin typeface="Nunito Sans"/>
               </a:rPr>
-              <a:t>Ver cómo usan las tiendas y los anuncios el primer precio y la forma de decir las cosas.</a:t>
+              <a:t>Ver ejemplos de cómo el aspecto o la fama cambian lo que pensamos de alguien.</a:t>
             </a:r>
           </a:p>
         </p:txBody>
@@ -5981,7 +5981,7 @@
                 </a:solidFill>
                 <a:latin typeface="Nunito Sans"/>
               </a:rPr>
-              <a:t>Ser bueno en una cosa no te hace ______ en otra.  (sesión 45)</a:t>
+              <a:t>Para poner a prueba una idea, es mejor buscar ______: casos que podrían quitarme la razón.  (sesión 45)</a:t>
             </a:r>
           </a:p>
           <a:p>
@@ -6006,7 +6006,7 @@
                 </a:solidFill>
                 <a:latin typeface="Nunito Sans"/>
               </a:rPr>
-              <a:t>El efecto ______ es juzgar a alguien entero por un solo rasgo.  (sesión 45)</a:t>
+              <a:t>El sesgo de ______ es fijarnos solo en lo que confirma lo que ya creemos.  (sesión 45)</a:t>
             </a:r>
           </a:p>
           <a:p>
@@ -6031,7 +6031,7 @@
                 </a:solidFill>
                 <a:latin typeface="Nunito Sans"/>
               </a:rPr>
-              <a:t>Una ______ es un caso suelto que alguien cuenta.  (sesión 41)</a:t>
+              <a:t>Elegir entre pizza o hamburguesa no es un dilema: es elegir entre dos ______.  (sesión 41)</a:t>
             </a:r>
           </a:p>
         </p:txBody>
@@ -6183,7 +6183,7 @@
                 </a:solidFill>
                 <a:latin typeface="Nunito Sans"/>
               </a:rPr>
-              <a:t>Ser bueno en una cosa no te hace </a:t>
+              <a:t>Para poner a prueba una idea, es mejor buscar </a:t>
             </a:r>
             <a:r>
               <a:rPr sz="2600" b="1">
@@ -6192,7 +6192,7 @@
                 </a:solidFill>
                 <a:latin typeface="Nunito Sans"/>
               </a:rPr>
-              <a:t>experto</a:t>
+              <a:t>contraejemplos</a:t>
             </a:r>
             <a:r>
               <a:rPr sz="2600" b="0">
@@ -6201,7 +6201,7 @@
                 </a:solidFill>
                 <a:latin typeface="Nunito Sans"/>
               </a:rPr>
-              <a:t> en otra.  (sesión 45)</a:t>
+              <a:t>: casos que podrían quitarme la razón.  (sesión 45)</a:t>
             </a:r>
           </a:p>
           <a:p>
@@ -6226,7 +6226,7 @@
                 </a:solidFill>
                 <a:latin typeface="Nunito Sans"/>
               </a:rPr>
-              <a:t>El efecto </a:t>
+              <a:t>El sesgo de </a:t>
             </a:r>
             <a:r>
               <a:rPr sz="2600" b="1">
@@ -6235,7 +6235,7 @@
                 </a:solidFill>
                 <a:latin typeface="Nunito Sans"/>
               </a:rPr>
-              <a:t>halo</a:t>
+              <a:t>confirmación</a:t>
             </a:r>
             <a:r>
               <a:rPr sz="2600" b="0">
@@ -6244,7 +6244,7 @@
                 </a:solidFill>
                 <a:latin typeface="Nunito Sans"/>
               </a:rPr>
-              <a:t> es juzgar a alguien entero por un solo rasgo.  (sesión 45)</a:t>
+              <a:t> es fijarnos solo en lo que confirma lo que ya creemos.  (sesión 45)</a:t>
             </a:r>
           </a:p>
           <a:p>
@@ -6269,7 +6269,7 @@
                 </a:solidFill>
                 <a:latin typeface="Nunito Sans"/>
               </a:rPr>
-              <a:t>Una </a:t>
+              <a:t>Elegir entre pizza o hamburguesa no es un dilema: es elegir entre dos </a:t>
             </a:r>
             <a:r>
               <a:rPr sz="2600" b="1">
@@ -6278,7 +6278,7 @@
                 </a:solidFill>
                 <a:latin typeface="Nunito Sans"/>
               </a:rPr>
-              <a:t>anécdota</a:t>
+              <a:t>gustos</a:t>
             </a:r>
             <a:r>
               <a:rPr sz="2600" b="0">
@@ -6287,7 +6287,7 @@
                 </a:solidFill>
                 <a:latin typeface="Nunito Sans"/>
               </a:rPr>
-              <a:t> es un caso suelto que alguien cuenta.  (sesión 41)</a:t>
+              <a:t>.  (sesión 41)</a:t>
             </a:r>
           </a:p>
         </p:txBody>
@@ -6434,7 +6434,7 @@
                 </a:solidFill>
                 <a:latin typeface="Nunito Sans"/>
               </a:rPr>
-              <a:t>Unas zapatillas: «Antes 180 €. Ahora 90 €». Otras iguales, en otra tienda: «90 €».</a:t>
+              <a:t>Dos candidatos a monitor del campamento: uno llega con ropa de marca y sonriendo; otro, serio y despeinado.</a:t>
             </a:r>
           </a:p>
         </p:txBody>
@@ -6473,7 +6473,7 @@
                 </a:solidFill>
                 <a:latin typeface="Nunito Sans"/>
               </a:rPr>
-              <a:t>¿Cuáles te parecen más baratas?</a:t>
+              <a:t>¿Cuál crees que será mejor monitor? ¿Por qué lo has pensado?</a:t>
             </a:r>
           </a:p>
         </p:txBody>
@@ -6577,7 +6577,7 @@
                 </a:solidFill>
                 <a:latin typeface="Fredoka"/>
               </a:rPr>
-              <a:t>El primer número y la forma de decirlo</a:t>
+              <a:t>Un rasgo lo tiñe todo</a:t>
             </a:r>
           </a:p>
         </p:txBody>
@@ -6642,7 +6642,7 @@
                 </a:solidFill>
                 <a:latin typeface="Nunito Sans"/>
               </a:rPr>
-              <a:t>BLOQUE 1 · EL PRIMER NÚMERO Y LA FORMA DE DECIRLO</a:t>
+              <a:t>BLOQUE 1 · UN RASGO LO TIÑE TODO</a:t>
             </a:r>
           </a:p>
         </p:txBody>
@@ -6681,7 +6681,7 @@
                 </a:solidFill>
                 <a:latin typeface="Fredoka"/>
               </a:rPr>
-              <a:t>Anclaje</a:t>
+              <a:t>Efecto halo</a:t>
             </a:r>
           </a:p>
         </p:txBody>
@@ -6763,7 +6763,7 @@
                 </a:solidFill>
                 <a:latin typeface="Nunito Sans"/>
               </a:rPr>
-              <a:t>El anclaje es quedarnos enganchados al primer número que oímos y usarlo, sin querer, para decidir.</a:t>
+              <a:t>Es dejar que un rasgo que nos gusta (o que no nos gusta) tiña todo lo que pensamos de alguien.</a:t>
             </a:r>
           </a:p>
         </p:txBody>
@@ -6811,7 +6811,7 @@
                 </a:solidFill>
                 <a:latin typeface="Nunito Sans"/>
               </a:rPr>
-              <a:t>Ancla:</a:t>
+              <a:t>Halo:</a:t>
             </a:r>
             <a:r>
               <a:rPr sz="2800" b="0">
@@ -6820,7 +6820,7 @@
                 </a:solidFill>
                 <a:latin typeface="Nunito Sans"/>
               </a:rPr>
-              <a:t> el hierro que sujeta un barco al fondo</a:t>
+              <a:t> el círculo de luz de los santos en los cuadros</a:t>
             </a:r>
           </a:p>
           <a:p>
@@ -6845,7 +6845,7 @@
                 </a:solidFill>
                 <a:latin typeface="Nunito Sans"/>
               </a:rPr>
-              <a:t>El primer precio hace que el segundo parezca barato o caro</a:t>
+              <a:t>Un rasgo bueno lo ilumina todo: «es guapo, será listo»</a:t>
             </a:r>
           </a:p>
           <a:p>
@@ -6870,7 +6870,7 @@
                 </a:solidFill>
                 <a:latin typeface="Nunito Sans"/>
               </a:rPr>
-              <a:t>Funciona incluso si el primer número sale al azar</a:t>
+              <a:t>Al revés también: un rasgo malo lo oscurece todo</a:t>
             </a:r>
           </a:p>
           <a:p>
@@ -6895,7 +6895,7 @@
                 </a:solidFill>
                 <a:latin typeface="Nunito Sans"/>
               </a:rPr>
-              <a:t>Ojo si el número no viene a cuento o es inventado</a:t>
+              <a:t>Lo describió el psicólogo Edward Thorndike en 1920</a:t>
             </a:r>
           </a:p>
         </p:txBody>
@@ -6960,7 +6960,7 @@
                 </a:solidFill>
                 <a:latin typeface="Nunito Sans"/>
               </a:rPr>
-              <a:t>BLOQUE 1 · EL PRIMER NÚMERO Y LA FORMA DE DECIRLO</a:t>
+              <a:t>BLOQUE 1 · UN RASGO LO TIÑE TODO</a:t>
             </a:r>
           </a:p>
         </p:txBody>
@@ -6999,57 +6999,14 @@
                 </a:solidFill>
                 <a:latin typeface="Fredoka"/>
               </a:rPr>
-              <a:t>Encuadre</a:t>
-            </a:r>
-          </a:p>
-        </p:txBody>
-      </p:sp>
-      <p:sp>
-        <p:nvSpPr>
-          <p:cNvPr id="4" name="Rectangle 3"/>
-          <p:cNvSpPr/>
-          <p:nvPr/>
-        </p:nvSpPr>
-        <p:spPr>
-          <a:xfrm>
-            <a:off x="640000" y="1650000"/>
-            <a:ext cx="10912000" cy="1150000"/>
-          </a:xfrm>
-          <a:prstGeom prst="rect">
-            <a:avLst/>
-          </a:prstGeom>
-          <a:solidFill>
-            <a:srgbClr val="EAF0F7"/>
-          </a:solidFill>
-          <a:ln>
-            <a:noFill/>
-          </a:ln>
-        </p:spPr>
-        <p:style>
-          <a:lnRef idx="1">
-            <a:schemeClr val="accent1"/>
-          </a:lnRef>
-          <a:fillRef idx="3">
-            <a:schemeClr val="accent1"/>
-          </a:fillRef>
-          <a:effectRef idx="2">
-            <a:schemeClr val="accent1"/>
-          </a:effectRef>
-          <a:fontRef idx="minor">
-            <a:schemeClr val="lt1"/>
-          </a:fontRef>
-        </p:style>
-        <p:txBody>
-          <a:bodyPr rtlCol="0" anchor="ctr"/>
-          <a:lstStyle/>
-          <a:p>
-            <a:pPr algn="ctr"/>
-          </a:p>
-        </p:txBody>
-      </p:sp>
-      <p:sp>
-        <p:nvSpPr>
-          <p:cNvPr id="5" name="TextBox 4"/>
+              <a:t>Primeras impresiones</a:t>
+            </a:r>
+          </a:p>
+        </p:txBody>
+      </p:sp>
+      <p:sp>
+        <p:nvSpPr>
+          <p:cNvPr id="4" name="TextBox 3"/>
           <p:cNvSpPr txBox="1"/>
           <p:nvPr/>
         </p:nvSpPr>
@@ -7071,24 +7028,24 @@
           <a:p>
             <a:pPr>
               <a:spcAft>
-                <a:spcPts val="1260"/>
-              </a:spcAft>
-            </a:pPr>
-            <a:r>
-              <a:rPr sz="2800" b="1">
+                <a:spcPts val="1080"/>
+              </a:spcAft>
+            </a:pPr>
+            <a:r>
+              <a:rPr sz="2400" b="0">
                 <a:solidFill>
                   <a:srgbClr val="1F2A44"/>
                 </a:solidFill>
                 <a:latin typeface="Nunito Sans"/>
               </a:rPr>
-              <a:t>El encuadre es la forma de presentar un dato. El mismo dato, dicho de otra manera, cambia lo que elegimos.</a:t>
-            </a:r>
-          </a:p>
-        </p:txBody>
-      </p:sp>
-      <p:sp>
-        <p:nvSpPr>
-          <p:cNvPr id="6" name="TextBox 5"/>
+              <a:t>Nos hacemos una idea de alguien en muy poco tiempo.</a:t>
+            </a:r>
+          </a:p>
+        </p:txBody>
+      </p:sp>
+      <p:sp>
+        <p:nvSpPr>
+          <p:cNvPr id="5" name="TextBox 4"/>
           <p:cNvSpPr txBox="1"/>
           <p:nvPr/>
         </p:nvSpPr>
@@ -7123,13 +7080,54 @@
               <a:t>• </a:t>
             </a:r>
             <a:r>
+              <a:rPr sz="2800" b="0">
+                <a:solidFill>
+                  <a:srgbClr val="1F2A44"/>
+                </a:solidFill>
+                <a:latin typeface="Nunito Sans"/>
+              </a:rPr>
+              <a:t>Basta ver una cara un instante para juzgar si parece de fiar</a:t>
+            </a:r>
+          </a:p>
+          <a:p>
+            <a:pPr>
+              <a:spcAft>
+                <a:spcPts val="1260"/>
+              </a:spcAft>
+            </a:pPr>
+            <a:r>
               <a:rPr sz="2800" b="1">
                 <a:solidFill>
+                  <a:srgbClr val="E8793A"/>
+                </a:solidFill>
+                <a:latin typeface="Nunito Sans"/>
+              </a:rPr>
+              <a:t>• </a:t>
+            </a:r>
+            <a:r>
+              <a:rPr sz="2800" b="0">
+                <a:solidFill>
                   <a:srgbClr val="1F2A44"/>
                 </a:solidFill>
                 <a:latin typeface="Nunito Sans"/>
               </a:rPr>
-              <a:t>Encuadre:</a:t>
+              <a:t>Esa primera idea suele costar cambiarla</a:t>
+            </a:r>
+          </a:p>
+          <a:p>
+            <a:pPr>
+              <a:spcAft>
+                <a:spcPts val="1260"/>
+              </a:spcAft>
+            </a:pPr>
+            <a:r>
+              <a:rPr sz="2800" b="1">
+                <a:solidFill>
+                  <a:srgbClr val="E8793A"/>
+                </a:solidFill>
+                <a:latin typeface="Nunito Sans"/>
+              </a:rPr>
+              <a:t>• </a:t>
             </a:r>
             <a:r>
               <a:rPr sz="2800" b="0">
@@ -7138,7 +7136,7 @@
                 </a:solidFill>
                 <a:latin typeface="Nunito Sans"/>
               </a:rPr>
-              <a:t> el marco, como el de una foto</a:t>
+              <a:t>Luego buscamos pruebas que la confirmen (sesión 45)</a:t>
             </a:r>
           </a:p>
           <a:p>
@@ -7163,32 +7161,7 @@
                 </a:solidFill>
                 <a:latin typeface="Nunito Sans"/>
               </a:rPr>
-              <a:t>«90 % sobreviven» y «10 % mueren» dicen lo mismo</a:t>
-            </a:r>
-          </a:p>
-          <a:p>
-            <a:pPr>
-              <a:spcAft>
-                <a:spcPts val="1260"/>
-              </a:spcAft>
-            </a:pPr>
-            <a:r>
-              <a:rPr sz="2800" b="1">
-                <a:solidFill>
-                  <a:srgbClr val="E8793A"/>
-                </a:solidFill>
-                <a:latin typeface="Nunito Sans"/>
-              </a:rPr>
-              <a:t>• </a:t>
-            </a:r>
-            <a:r>
-              <a:rPr sz="2800" b="0">
-                <a:solidFill>
-                  <a:srgbClr val="1F2A44"/>
-                </a:solidFill>
-                <a:latin typeface="Nunito Sans"/>
-              </a:rPr>
-              <a:t>Pero con la primera frase más gente elige operarse</a:t>
+              <a:t>Pero una cara o una ropa dicen muy poco de cómo es alguien</a:t>
             </a:r>
           </a:p>
         </p:txBody>
@@ -7253,7 +7226,7 @@
                 </a:solidFill>
                 <a:latin typeface="Nunito Sans"/>
               </a:rPr>
-              <a:t>BLOQUE 1 · EL PRIMER NÚMERO Y LA FORMA DE DECIRLO</a:t>
+              <a:t>BLOQUE 1 · UN RASGO LO TIÑE TODO</a:t>
             </a:r>
           </a:p>
         </p:txBody>
@@ -7292,7 +7265,7 @@
                 </a:solidFill>
                 <a:latin typeface="Fredoka"/>
               </a:rPr>
-              <a:t>Mismo dato, distinto encuadre</a:t>
+              <a:t>Dónde aparece el halo</a:t>
             </a:r>
           </a:p>
         </p:txBody>
@@ -7307,7 +7280,7 @@
         </p:nvGraphicFramePr>
         <p:xfrm>
           <a:off x="640000" y="1700000"/>
-          <a:ext cx="10912000" cy="2400000"/>
+          <a:ext cx="10912000" cy="3000000"/>
         </p:xfrm>
         <a:graphic>
           <a:graphicData uri="http://schemas.openxmlformats.org/drawingml/2006/table">
@@ -7333,7 +7306,7 @@
                           </a:solidFill>
                           <a:latin typeface="Fredoka"/>
                         </a:rPr>
-                        <a:t>Dicho así…</a:t>
+                        <a:t>Situación</a:t>
                       </a:r>
                     </a:p>
                   </a:txBody>
@@ -7355,7 +7328,7 @@
                           </a:solidFill>
                           <a:latin typeface="Fredoka"/>
                         </a:rPr>
-                        <a:t>…o así</a:t>
+                        <a:t>El rasgo</a:t>
                       </a:r>
                     </a:p>
                   </a:txBody>
@@ -7377,7 +7350,7 @@
                           </a:solidFill>
                           <a:latin typeface="Fredoka"/>
                         </a:rPr>
-                        <a:t>¿Cuál suena mejor?</a:t>
+                        <a:t>Lo que se deduce sin pruebas</a:t>
                       </a:r>
                     </a:p>
                   </a:txBody>
@@ -7401,7 +7374,7 @@
                           </a:solidFill>
                           <a:latin typeface="Nunito Sans"/>
                         </a:rPr>
-                        <a:t>«Carne 75 % sin grasa»</a:t>
+                        <a:t>Anuncio</a:t>
                       </a:r>
                     </a:p>
                   </a:txBody>
@@ -7423,7 +7396,7 @@
                           </a:solidFill>
                           <a:latin typeface="Nunito Sans"/>
                         </a:rPr>
-                        <a:t>«Carne con 25 % de grasa»</a:t>
+                        <a:t>Un futbolista famoso</a:t>
                       </a:r>
                     </a:p>
                   </a:txBody>
@@ -7445,7 +7418,7 @@
                           </a:solidFill>
                           <a:latin typeface="Nunito Sans"/>
                         </a:rPr>
-                        <a:t>La primera, aunque es igual</a:t>
+                        <a:t>«El producto es bueno»</a:t>
                       </a:r>
                     </a:p>
                   </a:txBody>
@@ -7469,7 +7442,7 @@
                           </a:solidFill>
                           <a:latin typeface="Nunito Sans"/>
                         </a:rPr>
-                        <a:t>«Aprobó el 75 % de la clase»</a:t>
+                        <a:t>Examen</a:t>
                       </a:r>
                     </a:p>
                   </a:txBody>
@@ -7491,7 +7464,7 @@
                           </a:solidFill>
                           <a:latin typeface="Nunito Sans"/>
                         </a:rPr>
-                        <a:t>«Suspendió 1 de cada 4»</a:t>
+                        <a:t>Letra bonita y limpia</a:t>
                       </a:r>
                     </a:p>
                   </a:txBody>
@@ -7513,7 +7486,7 @@
                           </a:solidFill>
                           <a:latin typeface="Nunito Sans"/>
                         </a:rPr>
-                        <a:t>La primera, aunque es igual</a:t>
+                        <a:t>«Las respuestas están mejor»</a:t>
                       </a:r>
                     </a:p>
                   </a:txBody>
@@ -7537,7 +7510,7 @@
                           </a:solidFill>
                           <a:latin typeface="Nunito Sans"/>
                         </a:rPr>
-                        <a:t>«El 90 % sobrevive a la operación»</a:t>
+                        <a:t>Redes</a:t>
                       </a:r>
                     </a:p>
                   </a:txBody>
@@ -7559,7 +7532,7 @@
                           </a:solidFill>
                           <a:latin typeface="Nunito Sans"/>
                         </a:rPr>
-                        <a:t>«El 10 % muere en la operación»</a:t>
+                        <a:t>Muchos seguidores</a:t>
                       </a:r>
                     </a:p>
                   </a:txBody>
@@ -7581,13 +7554,81 @@
                           </a:solidFill>
                           <a:latin typeface="Nunito Sans"/>
                         </a:rPr>
-                        <a:t>La primera: más gente la elige</a:t>
+                        <a:t>«Sabe de lo que habla»</a:t>
                       </a:r>
                     </a:p>
                   </a:txBody>
                   <a:tcPr>
                     <a:solidFill>
                       <a:srgbClr val="FFFFFF"/>
+                    </a:solidFill>
+                  </a:tcPr>
+                </a:tc>
+              </a:tr>
+              <a:tr h="600000">
+                <a:tc>
+                  <a:txBody>
+                    <a:bodyPr/>
+                    <a:lstStyle/>
+                    <a:p>
+                      <a:r>
+                        <a:rPr sz="2000" b="0">
+                          <a:solidFill>
+                            <a:srgbClr val="1F2A44"/>
+                          </a:solidFill>
+                          <a:latin typeface="Nunito Sans"/>
+                        </a:rPr>
+                        <a:t>Entrevista de trabajo</a:t>
+                      </a:r>
+                    </a:p>
+                  </a:txBody>
+                  <a:tcPr>
+                    <a:solidFill>
+                      <a:srgbClr val="EAF0F7"/>
+                    </a:solidFill>
+                  </a:tcPr>
+                </a:tc>
+                <a:tc>
+                  <a:txBody>
+                    <a:bodyPr/>
+                    <a:lstStyle/>
+                    <a:p>
+                      <a:r>
+                        <a:rPr sz="2000" b="0">
+                          <a:solidFill>
+                            <a:srgbClr val="1F2A44"/>
+                          </a:solidFill>
+                          <a:latin typeface="Nunito Sans"/>
+                        </a:rPr>
+                        <a:t>Ropa elegante</a:t>
+                      </a:r>
+                    </a:p>
+                  </a:txBody>
+                  <a:tcPr>
+                    <a:solidFill>
+                      <a:srgbClr val="EAF0F7"/>
+                    </a:solidFill>
+                  </a:tcPr>
+                </a:tc>
+                <a:tc>
+                  <a:txBody>
+                    <a:bodyPr/>
+                    <a:lstStyle/>
+                    <a:p>
+                      <a:r>
+                        <a:rPr sz="2000" b="0">
+                          <a:solidFill>
+                            <a:srgbClr val="1F2A44"/>
+                          </a:solidFill>
+                          <a:latin typeface="Nunito Sans"/>
+                        </a:rPr>
+                        <a:t>«Será buen trabajador»</a:t>
+                      </a:r>
+                    </a:p>
+                  </a:txBody>
+                  <a:tcPr>
+                    <a:solidFill>
+                      <a:srgbClr val="EAF0F7"/>
                     </a:solidFill>
                   </a:tcPr>
                 </a:tc>
